--- a/ppt/MLOps03-ML.pptx
+++ b/ppt/MLOps03-ML.pptx
@@ -7654,7 +7654,18 @@
             </a:r>
             <a:r>
               <a:rPr lang="fr-FR" dirty="0"/>
-              <a:t> –r requirement.txt</a:t>
+              <a:t> –r requirements.txt</a:t>
+            </a:r>
+          </a:p>
+          <a:p>
+            <a:pPr lvl="1"/>
+            <a:r>
+              <a:rPr lang="fr-FR" dirty="0" err="1"/>
+              <a:t>pip</a:t>
+            </a:r>
+            <a:r>
+              <a:rPr lang="fr-FR" dirty="0"/>
+              <a:t> freeze &gt; requirements.txt</a:t>
             </a:r>
           </a:p>
         </p:txBody>
